--- a/decks/hist-whitechapel/hist-whitechapel_ch2_conditions-and-crime.pptx
+++ b/decks/hist-whitechapel/hist-whitechapel_ch2_conditions-and-crime.pptx
@@ -129,30 +129,30 @@
   <p:extLst>
     <p:ext uri="{521415D9-36F7-43E2-AB2F-B90AF26B5E84}">
       <p14:sectionLst xmlns:p14="http://schemas.microsoft.com/office/powerpoint/2010/main">
-        <p14:section name="Opening" id="{2449b807-6115-a93d-8052-e7e39b68c92f}">
+        <p14:section name="Opening" id="{50fa5a5e-61f1-a6ad-fd0e-4243c86c1e41}">
           <p14:sldIdLst>
             <p14:sldId id="256"/>
           </p14:sldIdLst>
         </p14:section>
-        <p14:section name="Gate" id="{f8e75fea-26d3-9319-0747-4712df31341d}">
+        <p14:section name="Gate" id="{657fa938-aa6c-22dd-150a-bbd675df8be7}">
           <p14:sldIdLst>
             <p14:sldId id="257"/>
             <p14:sldId id="258"/>
           </p14:sldIdLst>
         </p14:section>
-        <p14:section name="Pre-teach" id="{1bb8f72b-f161-8b1a-554b-f451d5458049}">
+        <p14:section name="Pre-teach" id="{f2bbf23f-efa1-541b-06a9-53d444e0a103}">
           <p14:sldIdLst>
             <p14:sldId id="259"/>
             <p14:sldId id="260"/>
           </p14:sldIdLst>
         </p14:section>
-        <p14:section name="Read-along" id="{2a1f54f1-db2d-9f09-9d3d-22f8396f1115}">
+        <p14:section name="Read-along" id="{7e9f8ce0-fe9a-0798-5a15-42a7a810cd8d}">
           <p14:sldIdLst>
             <p14:sldId id="261"/>
             <p14:sldId id="262"/>
           </p14:sldIdLst>
         </p14:section>
-        <p14:section name="Teach" id="{f1363119-0827-83e4-430e-b441fed19530}">
+        <p14:section name="Teach" id="{f15ddac8-8677-805b-ed5a-13ddca9c9a75}">
           <p14:sldIdLst>
             <p14:sldId id="263"/>
             <p14:sldId id="264"/>
@@ -162,7 +162,7 @@
             <p14:sldId id="268"/>
           </p14:sldIdLst>
         </p14:section>
-        <p14:section name="Routes" id="{aff5ab57-4829-d42b-f91a-67975ded64d3}">
+        <p14:section name="Routes" id="{fdbf015f-501e-760e-496d-b11fe4b06aad}">
           <p14:sldIdLst>
             <p14:sldId id="269"/>
             <p14:sldId id="270"/>
@@ -171,12 +171,12 @@
             <p14:sldId id="273"/>
           </p14:sldIdLst>
         </p14:section>
-        <p14:section name="Close" id="{da5fdf24-7169-51ff-cb3c-6cd2a373877d}">
+        <p14:section name="Close" id="{461e8bd1-3839-7ebc-b30b-2e761a2c08cd}">
           <p14:sldIdLst>
             <p14:sldId id="274"/>
           </p14:sldIdLst>
         </p14:section>
-        <p14:section name="Answers" id="{95f09a9d-6456-13fd-c23c-7e478dfd7304}">
+        <p14:section name="Answers" id="{c7f3bdd2-1bf1-901a-fe3c-1b53109b4249}">
           <p14:sldIdLst>
             <p14:sldId id="275"/>
             <p14:sldId id="276"/>
